--- a/02/ppt/02-2_숫자와_변수로_계산하기_v1.pptx
+++ b/02/ppt/02-2_숫자와_변수로_계산하기_v1.pptx
@@ -8894,7 +8894,7 @@
                 <a:ea typeface="IBM Plex Sans KR"/>
                 <a:cs typeface="IBM Plex Sans KR"/>
               </a:rPr>
-              <a:t>교과서 02-2 · 6쪽</a:t>
+              <a:t>교과서 02-2 · 7–8쪽</a:t>
             </a:r>
           </a:p>
         </p:txBody>
@@ -9322,7 +9322,7 @@
                 <a:ea typeface="IBM Plex Sans KR"/>
                 <a:cs typeface="IBM Plex Sans KR"/>
               </a:rPr>
-              <a:t>교과서 02-2 · 7쪽</a:t>
+              <a:t>교과서 02-2 · 9쪽</a:t>
             </a:r>
           </a:p>
         </p:txBody>
@@ -9775,7 +9775,7 @@
                 <a:ea typeface="IBM Plex Sans KR"/>
                 <a:cs typeface="IBM Plex Sans KR"/>
               </a:rPr>
-              <a:t>교과서 02-2 · 7쪽</a:t>
+              <a:t>교과서 02-2 · 10쪽</a:t>
             </a:r>
           </a:p>
         </p:txBody>
@@ -10645,7 +10645,7 @@
                 <a:ea typeface="IBM Plex Sans KR"/>
                 <a:cs typeface="IBM Plex Sans KR"/>
               </a:rPr>
-              <a:t>교과서 02-2 · 8–9쪽</a:t>
+              <a:t>교과서 02-2 · 11–14쪽</a:t>
             </a:r>
           </a:p>
         </p:txBody>
@@ -11161,7 +11161,7 @@
                 <a:ea typeface="IBM Plex Sans KR"/>
                 <a:cs typeface="IBM Plex Sans KR"/>
               </a:rPr>
-              <a:t>교과서 02-2 · 10쪽</a:t>
+              <a:t>교과서 02-2 · 15쪽</a:t>
             </a:r>
           </a:p>
         </p:txBody>
@@ -12004,7 +12004,7 @@
                 <a:ea typeface="IBM Plex Sans KR"/>
                 <a:cs typeface="IBM Plex Sans KR"/>
               </a:rPr>
-              <a:t>교과서 02-2 · 준비</a:t>
+              <a:t>교과서 02-2 · 2쪽</a:t>
             </a:r>
           </a:p>
         </p:txBody>
@@ -12849,7 +12849,7 @@
                 <a:ea typeface="IBM Plex Sans KR"/>
                 <a:cs typeface="IBM Plex Sans KR"/>
               </a:rPr>
-              <a:t>교과서 02-2 · 10쪽</a:t>
+              <a:t>교과서 02-2 · 15쪽</a:t>
             </a:r>
           </a:p>
         </p:txBody>
@@ -14114,7 +14114,7 @@
                 <a:ea typeface="IBM Plex Sans KR"/>
                 <a:cs typeface="IBM Plex Sans KR"/>
               </a:rPr>
-              <a:t>교과서 02-2 · 10쪽</a:t>
+              <a:t>교과서 02-2 · 15쪽</a:t>
             </a:r>
           </a:p>
         </p:txBody>
@@ -15204,7 +15204,7 @@
                 <a:ea typeface="IBM Plex Sans KR"/>
                 <a:cs typeface="IBM Plex Sans KR"/>
               </a:rPr>
-              <a:t>교과서 02-2 · 11쪽</a:t>
+              <a:t>교과서 02-2 · 16쪽</a:t>
             </a:r>
           </a:p>
         </p:txBody>
@@ -16504,7 +16504,7 @@
                 <a:ea typeface="IBM Plex Sans KR"/>
                 <a:cs typeface="IBM Plex Sans KR"/>
               </a:rPr>
-              <a:t>교과서 02-2 · 12쪽</a:t>
+              <a:t>교과서 02-2 · 17–18쪽</a:t>
             </a:r>
           </a:p>
         </p:txBody>
@@ -17489,7 +17489,7 @@
                 <a:ea typeface="IBM Plex Sans KR"/>
                 <a:cs typeface="IBM Plex Sans KR"/>
               </a:rPr>
-              <a:t>교과서 02-2 · 12쪽</a:t>
+              <a:t>교과서 02-2 · 17–18쪽</a:t>
             </a:r>
           </a:p>
         </p:txBody>

--- a/02/ppt/02-2_숫자와_변수로_계산하기_v1.pptx
+++ b/02/ppt/02-2_숫자와_변수로_계산하기_v1.pptx
@@ -928,7 +928,7 @@
           <a:lstStyle/>
           <a:p>
             <a:r>
-              <a:t>교과서 7쪽과 같은 04_variables.py 전체 내용을 보여 준다.</a:t>
+              <a:t>교과서 8쪽과 같은 04_variables.py 전체 내용을 보여 준다.</a:t>
             </a:r>
           </a:p>
           <a:p>
@@ -3941,7 +3941,7 @@
                 <a:ea typeface="IBM Plex Sans KR"/>
                 <a:cs typeface="IBM Plex Sans KR"/>
               </a:rPr>
-              <a:t>교과서 02-2 · 5쪽</a:t>
+              <a:t>교과서 02-2 · 6쪽</a:t>
             </a:r>
           </a:p>
         </p:txBody>
@@ -4847,7 +4847,7 @@
                 <a:ea typeface="IBM Plex Sans KR"/>
                 <a:cs typeface="IBM Plex Sans KR"/>
               </a:rPr>
-              <a:t>교과서 02-2 · 5쪽</a:t>
+              <a:t>교과서 02-2 · 6쪽</a:t>
             </a:r>
           </a:p>
         </p:txBody>
@@ -5753,7 +5753,7 @@
                 <a:ea typeface="IBM Plex Sans KR"/>
                 <a:cs typeface="IBM Plex Sans KR"/>
               </a:rPr>
-              <a:t>교과서 02-2 · 5쪽</a:t>
+              <a:t>교과서 02-2 · 6쪽</a:t>
             </a:r>
           </a:p>
         </p:txBody>
@@ -7141,7 +7141,7 @@
                 <a:ea typeface="IBM Plex Sans KR"/>
                 <a:cs typeface="IBM Plex Sans KR"/>
               </a:rPr>
-              <a:t>교과서 02-2 · 6쪽</a:t>
+              <a:t>교과서 02-2 · 7쪽</a:t>
             </a:r>
           </a:p>
         </p:txBody>
@@ -7569,7 +7569,7 @@
                 <a:ea typeface="IBM Plex Sans KR"/>
                 <a:cs typeface="IBM Plex Sans KR"/>
               </a:rPr>
-              <a:t>교과서 02-2 · 6쪽</a:t>
+              <a:t>교과서 02-2 · 7쪽</a:t>
             </a:r>
           </a:p>
         </p:txBody>
@@ -8894,7 +8894,7 @@
                 <a:ea typeface="IBM Plex Sans KR"/>
                 <a:cs typeface="IBM Plex Sans KR"/>
               </a:rPr>
-              <a:t>교과서 02-2 · 7–8쪽</a:t>
+              <a:t>교과서 02-2 · 8–9쪽</a:t>
             </a:r>
           </a:p>
         </p:txBody>
@@ -9322,7 +9322,7 @@
                 <a:ea typeface="IBM Plex Sans KR"/>
                 <a:cs typeface="IBM Plex Sans KR"/>
               </a:rPr>
-              <a:t>교과서 02-2 · 9쪽</a:t>
+              <a:t>교과서 02-2 · 10쪽</a:t>
             </a:r>
           </a:p>
         </p:txBody>
@@ -9775,7 +9775,7 @@
                 <a:ea typeface="IBM Plex Sans KR"/>
                 <a:cs typeface="IBM Plex Sans KR"/>
               </a:rPr>
-              <a:t>교과서 02-2 · 10쪽</a:t>
+              <a:t>교과서 02-2 · 11쪽</a:t>
             </a:r>
           </a:p>
         </p:txBody>
@@ -10645,7 +10645,7 @@
                 <a:ea typeface="IBM Plex Sans KR"/>
                 <a:cs typeface="IBM Plex Sans KR"/>
               </a:rPr>
-              <a:t>교과서 02-2 · 11–14쪽</a:t>
+              <a:t>교과서 02-2 · 12–15쪽</a:t>
             </a:r>
           </a:p>
         </p:txBody>
@@ -11161,7 +11161,7 @@
                 <a:ea typeface="IBM Plex Sans KR"/>
                 <a:cs typeface="IBM Plex Sans KR"/>
               </a:rPr>
-              <a:t>교과서 02-2 · 15쪽</a:t>
+              <a:t>교과서 02-2 · 16쪽</a:t>
             </a:r>
           </a:p>
         </p:txBody>
@@ -12004,7 +12004,7 @@
                 <a:ea typeface="IBM Plex Sans KR"/>
                 <a:cs typeface="IBM Plex Sans KR"/>
               </a:rPr>
-              <a:t>교과서 02-2 · 2쪽</a:t>
+              <a:t>교과서 02-2 · 2–3쪽</a:t>
             </a:r>
           </a:p>
         </p:txBody>
@@ -12849,7 +12849,7 @@
                 <a:ea typeface="IBM Plex Sans KR"/>
                 <a:cs typeface="IBM Plex Sans KR"/>
               </a:rPr>
-              <a:t>교과서 02-2 · 15쪽</a:t>
+              <a:t>교과서 02-2 · 16쪽</a:t>
             </a:r>
           </a:p>
         </p:txBody>
@@ -14114,7 +14114,7 @@
                 <a:ea typeface="IBM Plex Sans KR"/>
                 <a:cs typeface="IBM Plex Sans KR"/>
               </a:rPr>
-              <a:t>교과서 02-2 · 15쪽</a:t>
+              <a:t>교과서 02-2 · 16쪽</a:t>
             </a:r>
           </a:p>
         </p:txBody>
@@ -15204,7 +15204,7 @@
                 <a:ea typeface="IBM Plex Sans KR"/>
                 <a:cs typeface="IBM Plex Sans KR"/>
               </a:rPr>
-              <a:t>교과서 02-2 · 16쪽</a:t>
+              <a:t>교과서 02-2 · 17쪽</a:t>
             </a:r>
           </a:p>
         </p:txBody>
@@ -16504,7 +16504,7 @@
                 <a:ea typeface="IBM Plex Sans KR"/>
                 <a:cs typeface="IBM Plex Sans KR"/>
               </a:rPr>
-              <a:t>교과서 02-2 · 17–18쪽</a:t>
+              <a:t>교과서 02-2 · 18–19쪽</a:t>
             </a:r>
           </a:p>
         </p:txBody>
@@ -17489,7 +17489,7 @@
                 <a:ea typeface="IBM Plex Sans KR"/>
                 <a:cs typeface="IBM Plex Sans KR"/>
               </a:rPr>
-              <a:t>교과서 02-2 · 17–18쪽</a:t>
+              <a:t>교과서 02-2 · 18–19쪽</a:t>
             </a:r>
           </a:p>
         </p:txBody>
@@ -18334,7 +18334,7 @@
                 <a:ea typeface="IBM Plex Sans KR"/>
                 <a:cs typeface="IBM Plex Sans KR"/>
               </a:rPr>
-              <a:t>교과서 02-2 · 3쪽</a:t>
+              <a:t>교과서 02-2 · 4쪽</a:t>
             </a:r>
           </a:p>
         </p:txBody>
@@ -19206,7 +19206,7 @@
                 <a:ea typeface="IBM Plex Sans KR"/>
                 <a:cs typeface="IBM Plex Sans KR"/>
               </a:rPr>
-              <a:t>교과서 02-2 · 3쪽</a:t>
+              <a:t>교과서 02-2 · 4쪽</a:t>
             </a:r>
           </a:p>
         </p:txBody>
@@ -20218,7 +20218,7 @@
                 <a:ea typeface="IBM Plex Sans KR"/>
                 <a:cs typeface="IBM Plex Sans KR"/>
               </a:rPr>
-              <a:t>교과서 02-2 · 3쪽</a:t>
+              <a:t>교과서 02-2 · 4쪽</a:t>
             </a:r>
           </a:p>
         </p:txBody>
@@ -21036,7 +21036,7 @@
                 <a:ea typeface="IBM Plex Sans KR"/>
                 <a:cs typeface="IBM Plex Sans KR"/>
               </a:rPr>
-              <a:t>교과서 02-2 · 4쪽</a:t>
+              <a:t>교과서 02-2 · 5쪽</a:t>
             </a:r>
           </a:p>
         </p:txBody>
@@ -21942,7 +21942,7 @@
                 <a:ea typeface="IBM Plex Sans KR"/>
                 <a:cs typeface="IBM Plex Sans KR"/>
               </a:rPr>
-              <a:t>교과서 02-2 · 4쪽</a:t>
+              <a:t>교과서 02-2 · 5쪽</a:t>
             </a:r>
           </a:p>
         </p:txBody>
@@ -22904,7 +22904,7 @@
                 <a:ea typeface="IBM Plex Sans KR"/>
                 <a:cs typeface="IBM Plex Sans KR"/>
               </a:rPr>
-              <a:t>교과서 02-2 · 4쪽</a:t>
+              <a:t>교과서 02-2 · 5쪽</a:t>
             </a:r>
           </a:p>
         </p:txBody>
@@ -23810,7 +23810,7 @@
                 <a:ea typeface="IBM Plex Sans KR"/>
                 <a:cs typeface="IBM Plex Sans KR"/>
               </a:rPr>
-              <a:t>교과서 02-2 · 5쪽</a:t>
+              <a:t>교과서 02-2 · 6쪽</a:t>
             </a:r>
           </a:p>
         </p:txBody>
